--- a/Documents/Presentation/Project Update/Project Update 2 (week3 & 4).pptx
+++ b/Documents/Presentation/Project Update/Project Update 2 (week3 & 4).pptx
@@ -265,7 +265,7 @@
           <a:p>
             <a:fld id="{1205BE4E-4704-4F0B-B7F5-9A4EE53A526B}" type="datetimeFigureOut">
               <a:rPr lang="en-US" smtClean="0"/>
-              <a:t>5/29/2026</a:t>
+              <a:t>5/30/2026</a:t>
             </a:fld>
             <a:endParaRPr lang="en-US"/>
           </a:p>
@@ -463,7 +463,7 @@
           <a:p>
             <a:fld id="{1205BE4E-4704-4F0B-B7F5-9A4EE53A526B}" type="datetimeFigureOut">
               <a:rPr lang="en-US" smtClean="0"/>
-              <a:t>5/29/2026</a:t>
+              <a:t>5/30/2026</a:t>
             </a:fld>
             <a:endParaRPr lang="en-US"/>
           </a:p>
@@ -671,7 +671,7 @@
           <a:p>
             <a:fld id="{1205BE4E-4704-4F0B-B7F5-9A4EE53A526B}" type="datetimeFigureOut">
               <a:rPr lang="en-US" smtClean="0"/>
-              <a:t>5/29/2026</a:t>
+              <a:t>5/30/2026</a:t>
             </a:fld>
             <a:endParaRPr lang="en-US"/>
           </a:p>
@@ -873,7 +873,7 @@
           <a:p>
             <a:fld id="{1205BE4E-4704-4F0B-B7F5-9A4EE53A526B}" type="datetimeFigureOut">
               <a:rPr lang="en-US" smtClean="0"/>
-              <a:t>5/29/2026</a:t>
+              <a:t>5/30/2026</a:t>
             </a:fld>
             <a:endParaRPr lang="en-US"/>
           </a:p>
@@ -1148,7 +1148,7 @@
           <a:p>
             <a:fld id="{1205BE4E-4704-4F0B-B7F5-9A4EE53A526B}" type="datetimeFigureOut">
               <a:rPr lang="en-US" smtClean="0"/>
-              <a:t>5/29/2026</a:t>
+              <a:t>5/30/2026</a:t>
             </a:fld>
             <a:endParaRPr lang="en-US"/>
           </a:p>
@@ -1413,7 +1413,7 @@
           <a:p>
             <a:fld id="{1205BE4E-4704-4F0B-B7F5-9A4EE53A526B}" type="datetimeFigureOut">
               <a:rPr lang="en-US" smtClean="0"/>
-              <a:t>5/29/2026</a:t>
+              <a:t>5/30/2026</a:t>
             </a:fld>
             <a:endParaRPr lang="en-US"/>
           </a:p>
@@ -1825,7 +1825,7 @@
           <a:p>
             <a:fld id="{1205BE4E-4704-4F0B-B7F5-9A4EE53A526B}" type="datetimeFigureOut">
               <a:rPr lang="en-US" smtClean="0"/>
-              <a:t>5/29/2026</a:t>
+              <a:t>5/30/2026</a:t>
             </a:fld>
             <a:endParaRPr lang="en-US"/>
           </a:p>
@@ -1966,7 +1966,7 @@
           <a:p>
             <a:fld id="{1205BE4E-4704-4F0B-B7F5-9A4EE53A526B}" type="datetimeFigureOut">
               <a:rPr lang="en-US" smtClean="0"/>
-              <a:t>5/29/2026</a:t>
+              <a:t>5/30/2026</a:t>
             </a:fld>
             <a:endParaRPr lang="en-US"/>
           </a:p>
@@ -2079,7 +2079,7 @@
           <a:p>
             <a:fld id="{1205BE4E-4704-4F0B-B7F5-9A4EE53A526B}" type="datetimeFigureOut">
               <a:rPr lang="en-US" smtClean="0"/>
-              <a:t>5/29/2026</a:t>
+              <a:t>5/30/2026</a:t>
             </a:fld>
             <a:endParaRPr lang="en-US"/>
           </a:p>
@@ -2390,7 +2390,7 @@
           <a:p>
             <a:fld id="{1205BE4E-4704-4F0B-B7F5-9A4EE53A526B}" type="datetimeFigureOut">
               <a:rPr lang="en-US" smtClean="0"/>
-              <a:t>5/29/2026</a:t>
+              <a:t>5/30/2026</a:t>
             </a:fld>
             <a:endParaRPr lang="en-US"/>
           </a:p>
@@ -2678,7 +2678,7 @@
           <a:p>
             <a:fld id="{1205BE4E-4704-4F0B-B7F5-9A4EE53A526B}" type="datetimeFigureOut">
               <a:rPr lang="en-US" smtClean="0"/>
-              <a:t>5/29/2026</a:t>
+              <a:t>5/30/2026</a:t>
             </a:fld>
             <a:endParaRPr lang="en-US"/>
           </a:p>
@@ -2921,7 +2921,7 @@
             <a:fld id="{1205BE4E-4704-4F0B-B7F5-9A4EE53A526B}" type="datetimeFigureOut">
               <a:rPr lang="en-US" smtClean="0"/>
               <a:pPr/>
-              <a:t>5/29/2026</a:t>
+              <a:t>5/30/2026</a:t>
             </a:fld>
             <a:endParaRPr lang="en-US" dirty="0"/>
           </a:p>
@@ -3554,7 +3554,7 @@
             </a:br>
             <a:r>
               <a:rPr lang="en-US" dirty="0"/>
-              <a:t>Status: On track for final presentation 6/17</a:t>
+              <a:t>Status: On track</a:t>
             </a:r>
           </a:p>
         </p:txBody>
@@ -3575,7 +3575,7 @@
             <p:ph idx="1"/>
             <p:extLst>
               <p:ext uri="{D42A27DB-BD31-4B8C-83A1-F6EECF244321}">
-                <p14:modId xmlns:p14="http://schemas.microsoft.com/office/powerpoint/2010/main" val="2592554918"/>
+                <p14:modId xmlns:p14="http://schemas.microsoft.com/office/powerpoint/2010/main" val="2892717022"/>
               </p:ext>
             </p:extLst>
           </p:nvPr>
@@ -3588,7 +3588,7 @@
           <a:graphicData uri="http://schemas.openxmlformats.org/drawingml/2006/table">
             <a:tbl>
               <a:tblPr>
-                <a:tableStyleId>{3B4B98B0-60AC-42C2-AFA5-B58CD77FA1E5}</a:tableStyleId>
+                <a:tableStyleId>{073A0DAA-6AF3-43AB-8588-CEC1D06C72B9}</a:tableStyleId>
               </a:tblPr>
               <a:tblGrid>
                 <a:gridCol w="1105385">
@@ -3891,6 +3891,9 @@
                       </a:pPr>
                       <a:r>
                         <a:rPr lang="en-US" sz="1400" u="none" strike="noStrike" dirty="0">
+                          <a:solidFill>
+                            <a:srgbClr val="0070C0"/>
+                          </a:solidFill>
                           <a:effectLst/>
                           <a:latin typeface="Candara" panose="020E0502030303020204" pitchFamily="34" charset="0"/>
                         </a:rPr>
@@ -3898,7 +3901,7 @@
                       </a:r>
                       <a:endParaRPr lang="en-US" sz="1400" b="1" i="0" u="none" strike="noStrike" dirty="0">
                         <a:solidFill>
-                          <a:srgbClr val="000000"/>
+                          <a:srgbClr val="0070C0"/>
                         </a:solidFill>
                         <a:effectLst/>
                         <a:latin typeface="Candara" panose="020E0502030303020204" pitchFamily="34" charset="0"/>
@@ -3917,6 +3920,9 @@
                       </a:pPr>
                       <a:r>
                         <a:rPr lang="en-US" sz="1400" u="none" strike="noStrike" dirty="0">
+                          <a:solidFill>
+                            <a:srgbClr val="0070C0"/>
+                          </a:solidFill>
                           <a:effectLst/>
                           <a:latin typeface="Candara" panose="020E0502030303020204" pitchFamily="34" charset="0"/>
                         </a:rPr>
@@ -3924,7 +3930,7 @@
                       </a:r>
                       <a:endParaRPr lang="en-US" sz="1400" b="0" i="0" u="none" strike="noStrike" dirty="0">
                         <a:solidFill>
-                          <a:srgbClr val="000000"/>
+                          <a:srgbClr val="0070C0"/>
                         </a:solidFill>
                         <a:effectLst/>
                         <a:latin typeface="Candara" panose="020E0502030303020204" pitchFamily="34" charset="0"/>
@@ -3942,15 +3948,18 @@
                         <a:buNone/>
                       </a:pPr>
                       <a:r>
-                        <a:rPr lang="en-US" sz="1400" u="none" strike="noStrike">
+                        <a:rPr lang="en-US" sz="1400" u="none" strike="noStrike" dirty="0">
+                          <a:solidFill>
+                            <a:srgbClr val="0070C0"/>
+                          </a:solidFill>
                           <a:effectLst/>
                           <a:latin typeface="Candara" panose="020E0502030303020204" pitchFamily="34" charset="0"/>
                         </a:rPr>
                         <a:t> </a:t>
                       </a:r>
-                      <a:endParaRPr lang="en-US" sz="1400" b="0" i="0" u="none" strike="noStrike">
+                      <a:endParaRPr lang="en-US" sz="1400" b="0" i="0" u="none" strike="noStrike" dirty="0">
                         <a:solidFill>
-                          <a:srgbClr val="000000"/>
+                          <a:srgbClr val="0070C0"/>
                         </a:solidFill>
                         <a:effectLst/>
                         <a:latin typeface="Candara" panose="020E0502030303020204" pitchFamily="34" charset="0"/>
@@ -3969,6 +3978,9 @@
                       </a:pPr>
                       <a:r>
                         <a:rPr lang="en-US" sz="1400" u="none" strike="noStrike" dirty="0">
+                          <a:solidFill>
+                            <a:srgbClr val="0070C0"/>
+                          </a:solidFill>
                           <a:effectLst/>
                           <a:latin typeface="Candara" panose="020E0502030303020204" pitchFamily="34" charset="0"/>
                         </a:rPr>
@@ -3976,7 +3988,7 @@
                       </a:r>
                       <a:endParaRPr lang="en-US" sz="1400" b="1" i="0" u="none" strike="noStrike" dirty="0">
                         <a:solidFill>
-                          <a:srgbClr val="000000"/>
+                          <a:srgbClr val="0070C0"/>
                         </a:solidFill>
                         <a:effectLst/>
                         <a:latin typeface="Candara" panose="020E0502030303020204" pitchFamily="34" charset="0"/>
@@ -3995,6 +4007,9 @@
                       </a:pPr>
                       <a:r>
                         <a:rPr lang="en-US" sz="1400" u="none" strike="noStrike">
+                          <a:solidFill>
+                            <a:srgbClr val="0070C0"/>
+                          </a:solidFill>
                           <a:effectLst/>
                           <a:latin typeface="Candara" panose="020E0502030303020204" pitchFamily="34" charset="0"/>
                         </a:rPr>
@@ -4002,7 +4017,7 @@
                       </a:r>
                       <a:endParaRPr lang="en-US" sz="1400" b="1" i="0" u="none" strike="noStrike">
                         <a:solidFill>
-                          <a:srgbClr val="000000"/>
+                          <a:srgbClr val="0070C0"/>
                         </a:solidFill>
                         <a:effectLst/>
                         <a:latin typeface="Candara" panose="020E0502030303020204" pitchFamily="34" charset="0"/>
@@ -4020,15 +4035,38 @@
                         <a:buNone/>
                       </a:pPr>
                       <a:r>
-                        <a:rPr lang="en-US" sz="1400" u="none" strike="noStrike">
+                        <a:rPr lang="en-US" sz="1400" u="none" strike="noStrike" dirty="0">
+                          <a:solidFill>
+                            <a:srgbClr val="0070C0"/>
+                          </a:solidFill>
                           <a:effectLst/>
                           <a:latin typeface="Candara" panose="020E0502030303020204" pitchFamily="34" charset="0"/>
                         </a:rPr>
-                        <a:t>Project charter approved; requirements documented; architecture defined (MQTT → API → SQL → SignalR → React).</a:t>
+                        <a:t>Project charter approved; requirements documented; architecture defined (MQTT → API → SQL → </a:t>
                       </a:r>
-                      <a:endParaRPr lang="en-US" sz="1400" b="0" i="0" u="none" strike="noStrike">
+                      <a:r>
+                        <a:rPr lang="en-US" sz="1400" u="none" strike="noStrike" dirty="0" err="1">
+                          <a:solidFill>
+                            <a:srgbClr val="0070C0"/>
+                          </a:solidFill>
+                          <a:effectLst/>
+                          <a:latin typeface="Candara" panose="020E0502030303020204" pitchFamily="34" charset="0"/>
+                        </a:rPr>
+                        <a:t>SignalR</a:t>
+                      </a:r>
+                      <a:r>
+                        <a:rPr lang="en-US" sz="1400" u="none" strike="noStrike" dirty="0">
+                          <a:solidFill>
+                            <a:srgbClr val="0070C0"/>
+                          </a:solidFill>
+                          <a:effectLst/>
+                          <a:latin typeface="Candara" panose="020E0502030303020204" pitchFamily="34" charset="0"/>
+                        </a:rPr>
+                        <a:t> → React).</a:t>
+                      </a:r>
+                      <a:endParaRPr lang="en-US" sz="1400" b="0" i="0" u="none" strike="noStrike" dirty="0">
                         <a:solidFill>
-                          <a:srgbClr val="000000"/>
+                          <a:srgbClr val="0070C0"/>
                         </a:solidFill>
                         <a:effectLst/>
                         <a:latin typeface="Candara" panose="020E0502030303020204" pitchFamily="34" charset="0"/>
